--- a/Online_Grocery_Management_System_v2.pptx
+++ b/Online_Grocery_Management_System_v2.pptx
@@ -19,7 +19,7 @@
     <p:sldId id="264" r:id="rId10"/>
     <p:sldId id="265" r:id="rId11"/>
     <p:sldId id="266" r:id="rId12"/>
-    <p:sldId id="267" r:id="rId13"/>
+    <p:sldId id="274" r:id="rId13"/>
     <p:sldId id="268" r:id="rId14"/>
     <p:sldId id="269" r:id="rId15"/>
     <p:sldId id="271" r:id="rId16"/>
@@ -570,7 +570,7 @@
           <a:p>
             <a:fld id="{F7021451-1387-4CA6-816F-3879F97B5CBC}" type="slidenum">
               <a:rPr lang="en-US"/>
-              <a:t>12</a:t>
+              <a:t>13</a:t>
             </a:fld>
             <a:endParaRPr lang="en-US"/>
           </a:p>
@@ -654,7 +654,7 @@
           <a:p>
             <a:fld id="{F7021451-1387-4CA6-816F-3879F97B5CBC}" type="slidenum">
               <a:rPr lang="en-US"/>
-              <a:t>13</a:t>
+              <a:t>14</a:t>
             </a:fld>
             <a:endParaRPr lang="en-US"/>
           </a:p>
@@ -738,7 +738,7 @@
           <a:p>
             <a:fld id="{F7021451-1387-4CA6-816F-3879F97B5CBC}" type="slidenum">
               <a:rPr lang="en-US"/>
-              <a:t>14</a:t>
+              <a:t>15</a:t>
             </a:fld>
             <a:endParaRPr lang="en-US"/>
           </a:p>
@@ -822,7 +822,7 @@
           <a:p>
             <a:fld id="{F7021451-1387-4CA6-816F-3879F97B5CBC}" type="slidenum">
               <a:rPr lang="en-US"/>
-              <a:t>15</a:t>
+              <a:t>16</a:t>
             </a:fld>
             <a:endParaRPr lang="en-US"/>
           </a:p>
@@ -842,90 +842,6 @@
 </file>
 
 <file path=ppt/notesSlides/notesSlide16.xml><?xml version="1.0" encoding="utf-8"?>
-<p:notes xmlns:a="http://schemas.openxmlformats.org/drawingml/2006/main" xmlns:r="http://schemas.openxmlformats.org/officeDocument/2006/relationships" xmlns:p="http://schemas.openxmlformats.org/presentationml/2006/main">
-  <p:cSld>
-    <p:spTree>
-      <p:nvGrpSpPr>
-        <p:cNvPr id="1" name=""/>
-        <p:cNvGrpSpPr/>
-        <p:nvPr/>
-      </p:nvGrpSpPr>
-      <p:grpSpPr>
-        <a:xfrm>
-          <a:off x="0" y="0"/>
-          <a:ext cx="0" cy="0"/>
-          <a:chOff x="0" y="0"/>
-          <a:chExt cx="0" cy="0"/>
-        </a:xfrm>
-      </p:grpSpPr>
-      <p:sp>
-        <p:nvSpPr>
-          <p:cNvPr id="2" name="Slide Image Placeholder 1"/>
-          <p:cNvSpPr>
-            <a:spLocks noGrp="1" noRot="1" noChangeAspect="1"/>
-          </p:cNvSpPr>
-          <p:nvPr>
-            <p:ph type="sldImg"/>
-          </p:nvPr>
-        </p:nvSpPr>
-        <p:spPr/>
-      </p:sp>
-      <p:sp>
-        <p:nvSpPr>
-          <p:cNvPr id="3" name="Notes Placeholder 2"/>
-          <p:cNvSpPr>
-            <a:spLocks noGrp="1"/>
-          </p:cNvSpPr>
-          <p:nvPr>
-            <p:ph type="body" idx="1"/>
-          </p:nvPr>
-        </p:nvSpPr>
-        <p:spPr/>
-        <p:txBody>
-          <a:bodyPr/>
-          <a:lstStyle/>
-          <a:p>
-            <a:endParaRPr lang="en-US" dirty="0"/>
-          </a:p>
-        </p:txBody>
-      </p:sp>
-      <p:sp>
-        <p:nvSpPr>
-          <p:cNvPr id="4" name="Slide Number Placeholder 3"/>
-          <p:cNvSpPr>
-            <a:spLocks noGrp="1"/>
-          </p:cNvSpPr>
-          <p:nvPr>
-            <p:ph type="sldNum" sz="quarter" idx="10"/>
-          </p:nvPr>
-        </p:nvSpPr>
-        <p:spPr/>
-        <p:txBody>
-          <a:bodyPr/>
-          <a:lstStyle/>
-          <a:p>
-            <a:fld id="{F7021451-1387-4CA6-816F-3879F97B5CBC}" type="slidenum">
-              <a:rPr lang="en-US"/>
-              <a:t>16</a:t>
-            </a:fld>
-            <a:endParaRPr lang="en-US"/>
-          </a:p>
-        </p:txBody>
-      </p:sp>
-    </p:spTree>
-    <p:extLst>
-      <p:ext uri="{BB962C8B-B14F-4D97-AF65-F5344CB8AC3E}">
-        <p14:creationId xmlns:p14="http://schemas.microsoft.com/office/powerpoint/2010/main" val="1024086991"/>
-      </p:ext>
-    </p:extLst>
-  </p:cSld>
-  <p:clrMapOvr>
-    <a:masterClrMapping/>
-  </p:clrMapOvr>
-</p:notes>
-</file>
-
-<file path=ppt/notesSlides/notesSlide17.xml><?xml version="1.0" encoding="utf-8"?>
 <p:notes xmlns:a="http://schemas.openxmlformats.org/drawingml/2006/main" xmlns:r="http://schemas.openxmlformats.org/officeDocument/2006/relationships" xmlns:p="http://schemas.openxmlformats.org/presentationml/2006/main">
   <p:cSld>
     <p:spTree>
@@ -2462,6 +2378,13 @@
   <p:clrMapOvr>
     <a:masterClrMapping/>
   </p:clrMapOvr>
+  <p:timing>
+    <p:tnLst>
+      <p:par>
+        <p:cTn id="1" dur="indefinite" restart="never" nodeType="tmRoot"/>
+      </p:par>
+    </p:tnLst>
+  </p:timing>
 </p:sld>
 </file>
 
@@ -3479,6 +3402,13 @@
   <p:clrMapOvr>
     <a:masterClrMapping/>
   </p:clrMapOvr>
+  <p:timing>
+    <p:tnLst>
+      <p:par>
+        <p:cTn id="1" dur="indefinite" restart="never" nodeType="tmRoot"/>
+      </p:par>
+    </p:tnLst>
+  </p:timing>
 </p:sld>
 </file>
 
@@ -4762,20 +4692,19 @@
   <p:clrMapOvr>
     <a:masterClrMapping/>
   </p:clrMapOvr>
+  <p:timing>
+    <p:tnLst>
+      <p:par>
+        <p:cTn id="1" dur="indefinite" restart="never" nodeType="tmRoot"/>
+      </p:par>
+    </p:tnLst>
+  </p:timing>
 </p:sld>
 </file>
 
 <file path=ppt/slides/slide12.xml><?xml version="1.0" encoding="utf-8"?>
 <p:sld xmlns:a="http://schemas.openxmlformats.org/drawingml/2006/main" xmlns:r="http://schemas.openxmlformats.org/officeDocument/2006/relationships" xmlns:p="http://schemas.openxmlformats.org/presentationml/2006/main">
-  <p:cSld name="Slide 12">
-    <p:bg>
-      <p:bgPr>
-        <a:solidFill>
-          <a:srgbClr val="F9FBF9"/>
-        </a:solidFill>
-        <a:effectLst/>
-      </p:bgPr>
-    </p:bg>
+  <p:cSld>
     <p:spTree>
       <p:nvGrpSpPr>
         <p:cNvPr id="1" name=""/>
@@ -4792,7 +4721,7 @@
       </p:grpSpPr>
       <p:sp>
         <p:nvSpPr>
-          <p:cNvPr id="2" name="Shape 0"/>
+          <p:cNvPr id="3" name="Shape 0"/>
           <p:cNvSpPr/>
           <p:nvPr/>
         </p:nvSpPr>
@@ -4817,7 +4746,7 @@
       </p:sp>
       <p:sp>
         <p:nvSpPr>
-          <p:cNvPr id="3" name="Text 1"/>
+          <p:cNvPr id="4" name="Text 1"/>
           <p:cNvSpPr/>
           <p:nvPr/>
         </p:nvSpPr>
@@ -4851,2001 +4780,113 @@
           </a:p>
         </p:txBody>
       </p:sp>
-      <p:sp>
-        <p:nvSpPr>
-          <p:cNvPr id="4" name="Shape 2"/>
-          <p:cNvSpPr/>
-          <p:nvPr/>
-        </p:nvSpPr>
-        <p:spPr>
-          <a:xfrm>
-            <a:off x="274320" y="1005840"/>
-            <a:ext cx="4114800" cy="384048"/>
-          </a:xfrm>
-          <a:prstGeom prst="rect">
-            <a:avLst/>
-          </a:prstGeom>
-          <a:solidFill>
-            <a:srgbClr val="1565C0"/>
-          </a:solidFill>
-          <a:ln w="12700">
-            <a:solidFill>
-              <a:srgbClr val="1565C0"/>
-            </a:solidFill>
-            <a:prstDash val="solid"/>
-          </a:ln>
-        </p:spPr>
-      </p:sp>
-      <p:sp>
-        <p:nvSpPr>
-          <p:cNvPr id="5" name="Text 3"/>
-          <p:cNvSpPr/>
-          <p:nvPr/>
-        </p:nvSpPr>
-        <p:spPr>
-          <a:xfrm>
-            <a:off x="365760" y="1005840"/>
-            <a:ext cx="3931920" cy="384048"/>
-          </a:xfrm>
-          <a:prstGeom prst="rect">
-            <a:avLst/>
-          </a:prstGeom>
-          <a:noFill/>
-          <a:ln/>
-        </p:spPr>
-        <p:txBody>
-          <a:bodyPr wrap="square" rtlCol="0" anchor="ctr"/>
-          <a:lstStyle/>
-          <a:p>
-            <a:pPr marL="0" indent="0">
-              <a:buNone/>
-            </a:pPr>
-            <a:r>
-              <a:rPr lang="en-US" sz="1400" b="1" dirty="0">
-                <a:solidFill>
-                  <a:srgbClr val="FFFFFF"/>
-                </a:solidFill>
-              </a:rPr>
-              <a:t>🗂️  Customer</a:t>
-            </a:r>
-            <a:endParaRPr lang="en-US" sz="1400" dirty="0"/>
-          </a:p>
-        </p:txBody>
-      </p:sp>
-      <p:sp>
-        <p:nvSpPr>
-          <p:cNvPr id="6" name="Shape 4"/>
-          <p:cNvSpPr/>
-          <p:nvPr/>
-        </p:nvSpPr>
-        <p:spPr>
-          <a:xfrm>
-            <a:off x="274320" y="1389888"/>
-            <a:ext cx="4114800" cy="274320"/>
-          </a:xfrm>
-          <a:prstGeom prst="rect">
-            <a:avLst/>
-          </a:prstGeom>
-          <a:solidFill>
-            <a:srgbClr val="ECEFF1"/>
-          </a:solidFill>
-          <a:ln w="12700">
-            <a:solidFill>
-              <a:srgbClr val="BDBDBD"/>
-            </a:solidFill>
-            <a:prstDash val="solid"/>
-          </a:ln>
-        </p:spPr>
-      </p:sp>
-      <p:sp>
-        <p:nvSpPr>
-          <p:cNvPr id="7" name="Text 5"/>
-          <p:cNvSpPr/>
-          <p:nvPr/>
-        </p:nvSpPr>
-        <p:spPr>
-          <a:xfrm>
-            <a:off x="365760" y="1389888"/>
-            <a:ext cx="2194560" cy="274320"/>
-          </a:xfrm>
-          <a:prstGeom prst="rect">
-            <a:avLst/>
-          </a:prstGeom>
-          <a:noFill/>
-          <a:ln/>
-        </p:spPr>
-        <p:txBody>
-          <a:bodyPr wrap="square" rtlCol="0" anchor="ctr"/>
-          <a:lstStyle/>
-          <a:p>
-            <a:pPr marL="0" indent="0">
-              <a:buNone/>
-            </a:pPr>
-            <a:r>
-              <a:rPr lang="en-US" sz="1100" b="1" dirty="0">
-                <a:solidFill>
-                  <a:srgbClr val="546E7A"/>
-                </a:solidFill>
-              </a:rPr>
-              <a:t>Field Name</a:t>
-            </a:r>
-            <a:endParaRPr lang="en-US" sz="1100" dirty="0"/>
-          </a:p>
-        </p:txBody>
-      </p:sp>
-      <p:sp>
-        <p:nvSpPr>
-          <p:cNvPr id="8" name="Text 6"/>
-          <p:cNvSpPr/>
-          <p:nvPr/>
-        </p:nvSpPr>
-        <p:spPr>
-          <a:xfrm>
-            <a:off x="2560320" y="1389888"/>
-            <a:ext cx="1828800" cy="274320"/>
-          </a:xfrm>
-          <a:prstGeom prst="rect">
-            <a:avLst/>
-          </a:prstGeom>
-          <a:noFill/>
-          <a:ln/>
-        </p:spPr>
-        <p:txBody>
-          <a:bodyPr wrap="square" rtlCol="0" anchor="ctr"/>
-          <a:lstStyle/>
-          <a:p>
-            <a:pPr marL="0" indent="0">
-              <a:buNone/>
-            </a:pPr>
-            <a:r>
-              <a:rPr lang="en-US" sz="1100" b="1" dirty="0">
-                <a:solidFill>
-                  <a:srgbClr val="546E7A"/>
-                </a:solidFill>
-              </a:rPr>
-              <a:t>Data Type</a:t>
-            </a:r>
-            <a:endParaRPr lang="en-US" sz="1100" dirty="0"/>
-          </a:p>
-        </p:txBody>
-      </p:sp>
-      <p:sp>
-        <p:nvSpPr>
-          <p:cNvPr id="9" name="Shape 7"/>
-          <p:cNvSpPr/>
-          <p:nvPr/>
-        </p:nvSpPr>
-        <p:spPr>
-          <a:xfrm>
-            <a:off x="274320" y="1664208"/>
-            <a:ext cx="4114800" cy="292608"/>
-          </a:xfrm>
-          <a:prstGeom prst="rect">
-            <a:avLst/>
-          </a:prstGeom>
-          <a:solidFill>
-            <a:srgbClr val="FFFFFF"/>
-          </a:solidFill>
-          <a:ln w="12700">
-            <a:solidFill>
-              <a:srgbClr val="E0E0E0"/>
-            </a:solidFill>
-            <a:prstDash val="solid"/>
-          </a:ln>
-        </p:spPr>
-      </p:sp>
-      <p:sp>
-        <p:nvSpPr>
-          <p:cNvPr id="10" name="Text 8"/>
-          <p:cNvSpPr/>
-          <p:nvPr/>
-        </p:nvSpPr>
-        <p:spPr>
-          <a:xfrm>
-            <a:off x="365760" y="1664208"/>
-            <a:ext cx="2194560" cy="292608"/>
-          </a:xfrm>
-          <a:prstGeom prst="rect">
-            <a:avLst/>
-          </a:prstGeom>
-          <a:noFill/>
-          <a:ln/>
-        </p:spPr>
-        <p:txBody>
-          <a:bodyPr wrap="square" rtlCol="0" anchor="ctr"/>
-          <a:lstStyle/>
-          <a:p>
-            <a:pPr marL="0" indent="0">
-              <a:buNone/>
-            </a:pPr>
-            <a:r>
-              <a:rPr lang="en-US" sz="1100" dirty="0">
-                <a:solidFill>
-                  <a:srgbClr val="1B1B1B"/>
-                </a:solidFill>
-              </a:rPr>
-              <a:t>username</a:t>
-            </a:r>
-            <a:endParaRPr lang="en-US" sz="1100" dirty="0"/>
-          </a:p>
-        </p:txBody>
-      </p:sp>
-      <p:sp>
-        <p:nvSpPr>
-          <p:cNvPr id="11" name="Text 9"/>
-          <p:cNvSpPr/>
-          <p:nvPr/>
-        </p:nvSpPr>
-        <p:spPr>
-          <a:xfrm>
-            <a:off x="2560320" y="1664208"/>
-            <a:ext cx="1828800" cy="292608"/>
-          </a:xfrm>
-          <a:prstGeom prst="rect">
-            <a:avLst/>
-          </a:prstGeom>
-          <a:noFill/>
-          <a:ln/>
-        </p:spPr>
-        <p:txBody>
-          <a:bodyPr wrap="square" rtlCol="0" anchor="ctr"/>
-          <a:lstStyle/>
-          <a:p>
-            <a:pPr marL="0" indent="0">
-              <a:buNone/>
-            </a:pPr>
-            <a:r>
-              <a:rPr lang="en-US" sz="1100" dirty="0">
-                <a:solidFill>
-                  <a:srgbClr val="546E7A"/>
-                </a:solidFill>
-              </a:rPr>
-              <a:t>VARCHAR(20)</a:t>
-            </a:r>
-            <a:endParaRPr lang="en-US" sz="1100" dirty="0"/>
-          </a:p>
-        </p:txBody>
-      </p:sp>
-      <p:sp>
-        <p:nvSpPr>
-          <p:cNvPr id="12" name="Shape 10"/>
-          <p:cNvSpPr/>
-          <p:nvPr/>
-        </p:nvSpPr>
-        <p:spPr>
-          <a:xfrm>
-            <a:off x="274320" y="1956816"/>
-            <a:ext cx="4114800" cy="292608"/>
-          </a:xfrm>
-          <a:prstGeom prst="rect">
-            <a:avLst/>
-          </a:prstGeom>
-          <a:solidFill>
-            <a:srgbClr val="E8F5E9"/>
-          </a:solidFill>
-          <a:ln w="12700">
-            <a:solidFill>
-              <a:srgbClr val="E0E0E0"/>
-            </a:solidFill>
-            <a:prstDash val="solid"/>
-          </a:ln>
-        </p:spPr>
-      </p:sp>
-      <p:sp>
-        <p:nvSpPr>
-          <p:cNvPr id="13" name="Text 11"/>
-          <p:cNvSpPr/>
-          <p:nvPr/>
-        </p:nvSpPr>
-        <p:spPr>
-          <a:xfrm>
-            <a:off x="365760" y="1956816"/>
-            <a:ext cx="2194560" cy="292608"/>
-          </a:xfrm>
-          <a:prstGeom prst="rect">
-            <a:avLst/>
-          </a:prstGeom>
-          <a:noFill/>
-          <a:ln/>
-        </p:spPr>
-        <p:txBody>
-          <a:bodyPr wrap="square" rtlCol="0" anchor="ctr"/>
-          <a:lstStyle/>
-          <a:p>
-            <a:pPr marL="0" indent="0">
-              <a:buNone/>
-            </a:pPr>
-            <a:r>
-              <a:rPr lang="en-US" sz="1100" dirty="0">
-                <a:solidFill>
-                  <a:srgbClr val="1B1B1B"/>
-                </a:solidFill>
-              </a:rPr>
-              <a:t>password</a:t>
-            </a:r>
-            <a:endParaRPr lang="en-US" sz="1100" dirty="0"/>
-          </a:p>
-        </p:txBody>
-      </p:sp>
-      <p:sp>
-        <p:nvSpPr>
-          <p:cNvPr id="14" name="Text 12"/>
-          <p:cNvSpPr/>
-          <p:nvPr/>
-        </p:nvSpPr>
-        <p:spPr>
-          <a:xfrm>
-            <a:off x="2560320" y="1956816"/>
-            <a:ext cx="1828800" cy="292608"/>
-          </a:xfrm>
-          <a:prstGeom prst="rect">
-            <a:avLst/>
-          </a:prstGeom>
-          <a:noFill/>
-          <a:ln/>
-        </p:spPr>
-        <p:txBody>
-          <a:bodyPr wrap="square" rtlCol="0" anchor="ctr"/>
-          <a:lstStyle/>
-          <a:p>
-            <a:pPr marL="0" indent="0">
-              <a:buNone/>
-            </a:pPr>
-            <a:r>
-              <a:rPr lang="en-US" sz="1100" dirty="0">
-                <a:solidFill>
-                  <a:srgbClr val="546E7A"/>
-                </a:solidFill>
-              </a:rPr>
-              <a:t>NUMBER(20)</a:t>
-            </a:r>
-            <a:endParaRPr lang="en-US" sz="1100" dirty="0"/>
-          </a:p>
-        </p:txBody>
-      </p:sp>
-      <p:sp>
-        <p:nvSpPr>
-          <p:cNvPr id="15" name="Shape 13"/>
-          <p:cNvSpPr/>
-          <p:nvPr/>
-        </p:nvSpPr>
-        <p:spPr>
-          <a:xfrm>
-            <a:off x="274320" y="2249424"/>
-            <a:ext cx="4114800" cy="292608"/>
-          </a:xfrm>
-          <a:prstGeom prst="rect">
-            <a:avLst/>
-          </a:prstGeom>
-          <a:solidFill>
-            <a:srgbClr val="FFFFFF"/>
-          </a:solidFill>
-          <a:ln w="12700">
-            <a:solidFill>
-              <a:srgbClr val="E0E0E0"/>
-            </a:solidFill>
-            <a:prstDash val="solid"/>
-          </a:ln>
-        </p:spPr>
-      </p:sp>
-      <p:sp>
-        <p:nvSpPr>
-          <p:cNvPr id="16" name="Text 14"/>
-          <p:cNvSpPr/>
-          <p:nvPr/>
-        </p:nvSpPr>
-        <p:spPr>
-          <a:xfrm>
-            <a:off x="365760" y="2249424"/>
-            <a:ext cx="2194560" cy="292608"/>
-          </a:xfrm>
-          <a:prstGeom prst="rect">
-            <a:avLst/>
-          </a:prstGeom>
-          <a:noFill/>
-          <a:ln/>
-        </p:spPr>
-        <p:txBody>
-          <a:bodyPr wrap="square" rtlCol="0" anchor="ctr"/>
-          <a:lstStyle/>
-          <a:p>
-            <a:pPr marL="0" indent="0">
-              <a:buNone/>
-            </a:pPr>
-            <a:r>
-              <a:rPr lang="en-US" sz="1100" dirty="0">
-                <a:solidFill>
-                  <a:srgbClr val="1B1B1B"/>
-                </a:solidFill>
-              </a:rPr>
-              <a:t>address</a:t>
-            </a:r>
-            <a:endParaRPr lang="en-US" sz="1100" dirty="0"/>
-          </a:p>
-        </p:txBody>
-      </p:sp>
-      <p:sp>
-        <p:nvSpPr>
-          <p:cNvPr id="17" name="Text 15"/>
-          <p:cNvSpPr/>
-          <p:nvPr/>
-        </p:nvSpPr>
-        <p:spPr>
-          <a:xfrm>
-            <a:off x="2560320" y="2249424"/>
-            <a:ext cx="1828800" cy="292608"/>
-          </a:xfrm>
-          <a:prstGeom prst="rect">
-            <a:avLst/>
-          </a:prstGeom>
-          <a:noFill/>
-          <a:ln/>
-        </p:spPr>
-        <p:txBody>
-          <a:bodyPr wrap="square" rtlCol="0" anchor="ctr"/>
-          <a:lstStyle/>
-          <a:p>
-            <a:pPr marL="0" indent="0">
-              <a:buNone/>
-            </a:pPr>
-            <a:r>
-              <a:rPr lang="en-US" sz="1100" dirty="0">
-                <a:solidFill>
-                  <a:srgbClr val="546E7A"/>
-                </a:solidFill>
-              </a:rPr>
-              <a:t>VARCHAR(20)</a:t>
-            </a:r>
-            <a:endParaRPr lang="en-US" sz="1100" dirty="0"/>
-          </a:p>
-        </p:txBody>
-      </p:sp>
-      <p:sp>
-        <p:nvSpPr>
-          <p:cNvPr id="18" name="Shape 16"/>
-          <p:cNvSpPr/>
-          <p:nvPr/>
-        </p:nvSpPr>
-        <p:spPr>
-          <a:xfrm>
-            <a:off x="274320" y="2542032"/>
-            <a:ext cx="4114800" cy="292608"/>
-          </a:xfrm>
-          <a:prstGeom prst="rect">
-            <a:avLst/>
-          </a:prstGeom>
-          <a:solidFill>
-            <a:srgbClr val="E8F5E9"/>
-          </a:solidFill>
-          <a:ln w="12700">
-            <a:solidFill>
-              <a:srgbClr val="E0E0E0"/>
-            </a:solidFill>
-            <a:prstDash val="solid"/>
-          </a:ln>
-        </p:spPr>
-      </p:sp>
-      <p:sp>
-        <p:nvSpPr>
-          <p:cNvPr id="19" name="Text 17"/>
-          <p:cNvSpPr/>
-          <p:nvPr/>
-        </p:nvSpPr>
-        <p:spPr>
-          <a:xfrm>
-            <a:off x="365760" y="2542032"/>
-            <a:ext cx="2194560" cy="292608"/>
-          </a:xfrm>
-          <a:prstGeom prst="rect">
-            <a:avLst/>
-          </a:prstGeom>
-          <a:noFill/>
-          <a:ln/>
-        </p:spPr>
-        <p:txBody>
-          <a:bodyPr wrap="square" rtlCol="0" anchor="ctr"/>
-          <a:lstStyle/>
-          <a:p>
-            <a:pPr marL="0" indent="0">
-              <a:buNone/>
-            </a:pPr>
-            <a:r>
-              <a:rPr lang="en-US" sz="1100" dirty="0">
-                <a:solidFill>
-                  <a:srgbClr val="1B1B1B"/>
-                </a:solidFill>
-              </a:rPr>
-              <a:t>email_id</a:t>
-            </a:r>
-            <a:endParaRPr lang="en-US" sz="1100" dirty="0"/>
-          </a:p>
-        </p:txBody>
-      </p:sp>
-      <p:sp>
-        <p:nvSpPr>
-          <p:cNvPr id="20" name="Text 18"/>
-          <p:cNvSpPr/>
-          <p:nvPr/>
-        </p:nvSpPr>
-        <p:spPr>
-          <a:xfrm>
-            <a:off x="2560320" y="2542032"/>
-            <a:ext cx="1828800" cy="292608"/>
-          </a:xfrm>
-          <a:prstGeom prst="rect">
-            <a:avLst/>
-          </a:prstGeom>
-          <a:noFill/>
-          <a:ln/>
-        </p:spPr>
-        <p:txBody>
-          <a:bodyPr wrap="square" rtlCol="0" anchor="ctr"/>
-          <a:lstStyle/>
-          <a:p>
-            <a:pPr marL="0" indent="0">
-              <a:buNone/>
-            </a:pPr>
-            <a:r>
-              <a:rPr lang="en-US" sz="1100" dirty="0">
-                <a:solidFill>
-                  <a:srgbClr val="546E7A"/>
-                </a:solidFill>
-              </a:rPr>
-              <a:t>VARCHAR(20)</a:t>
-            </a:r>
-            <a:endParaRPr lang="en-US" sz="1100" dirty="0"/>
-          </a:p>
-        </p:txBody>
-      </p:sp>
-      <p:sp>
-        <p:nvSpPr>
-          <p:cNvPr id="21" name="Shape 19"/>
-          <p:cNvSpPr/>
-          <p:nvPr/>
-        </p:nvSpPr>
-        <p:spPr>
-          <a:xfrm>
-            <a:off x="4709160" y="1005840"/>
-            <a:ext cx="4114800" cy="384048"/>
-          </a:xfrm>
-          <a:prstGeom prst="rect">
-            <a:avLst/>
-          </a:prstGeom>
-          <a:solidFill>
-            <a:srgbClr val="00695C"/>
-          </a:solidFill>
-          <a:ln w="12700">
-            <a:solidFill>
-              <a:srgbClr val="00695C"/>
-            </a:solidFill>
-            <a:prstDash val="solid"/>
-          </a:ln>
-        </p:spPr>
-      </p:sp>
-      <p:sp>
-        <p:nvSpPr>
-          <p:cNvPr id="22" name="Text 20"/>
-          <p:cNvSpPr/>
-          <p:nvPr/>
-        </p:nvSpPr>
-        <p:spPr>
-          <a:xfrm>
-            <a:off x="4800600" y="1005840"/>
-            <a:ext cx="3931920" cy="384048"/>
-          </a:xfrm>
-          <a:prstGeom prst="rect">
-            <a:avLst/>
-          </a:prstGeom>
-          <a:noFill/>
-          <a:ln/>
-        </p:spPr>
-        <p:txBody>
-          <a:bodyPr wrap="square" rtlCol="0" anchor="ctr"/>
-          <a:lstStyle/>
-          <a:p>
-            <a:pPr marL="0" indent="0">
-              <a:buNone/>
-            </a:pPr>
-            <a:r>
-              <a:rPr lang="en-US" sz="1400" b="1" dirty="0">
-                <a:solidFill>
-                  <a:srgbClr val="FFFFFF"/>
-                </a:solidFill>
-              </a:rPr>
-              <a:t>🗂️  Products</a:t>
-            </a:r>
-            <a:endParaRPr lang="en-US" sz="1400" dirty="0"/>
-          </a:p>
-        </p:txBody>
-      </p:sp>
-      <p:sp>
-        <p:nvSpPr>
-          <p:cNvPr id="23" name="Shape 21"/>
-          <p:cNvSpPr/>
-          <p:nvPr/>
-        </p:nvSpPr>
-        <p:spPr>
-          <a:xfrm>
-            <a:off x="4709160" y="1389888"/>
-            <a:ext cx="4114800" cy="274320"/>
-          </a:xfrm>
-          <a:prstGeom prst="rect">
-            <a:avLst/>
-          </a:prstGeom>
-          <a:solidFill>
-            <a:srgbClr val="ECEFF1"/>
-          </a:solidFill>
-          <a:ln w="12700">
-            <a:solidFill>
-              <a:srgbClr val="BDBDBD"/>
-            </a:solidFill>
-            <a:prstDash val="solid"/>
-          </a:ln>
-        </p:spPr>
-      </p:sp>
-      <p:sp>
-        <p:nvSpPr>
-          <p:cNvPr id="24" name="Text 22"/>
-          <p:cNvSpPr/>
-          <p:nvPr/>
-        </p:nvSpPr>
-        <p:spPr>
-          <a:xfrm>
-            <a:off x="4800600" y="1389888"/>
-            <a:ext cx="2194560" cy="274320"/>
-          </a:xfrm>
-          <a:prstGeom prst="rect">
-            <a:avLst/>
-          </a:prstGeom>
-          <a:noFill/>
-          <a:ln/>
-        </p:spPr>
-        <p:txBody>
-          <a:bodyPr wrap="square" rtlCol="0" anchor="ctr"/>
-          <a:lstStyle/>
-          <a:p>
-            <a:pPr marL="0" indent="0">
-              <a:buNone/>
-            </a:pPr>
-            <a:r>
-              <a:rPr lang="en-US" sz="1100" b="1" dirty="0">
-                <a:solidFill>
-                  <a:srgbClr val="546E7A"/>
-                </a:solidFill>
-              </a:rPr>
-              <a:t>Field Name</a:t>
-            </a:r>
-            <a:endParaRPr lang="en-US" sz="1100" dirty="0"/>
-          </a:p>
-        </p:txBody>
-      </p:sp>
-      <p:sp>
-        <p:nvSpPr>
-          <p:cNvPr id="25" name="Text 23"/>
-          <p:cNvSpPr/>
-          <p:nvPr/>
-        </p:nvSpPr>
-        <p:spPr>
-          <a:xfrm>
-            <a:off x="6995160" y="1389888"/>
-            <a:ext cx="1828800" cy="274320"/>
-          </a:xfrm>
-          <a:prstGeom prst="rect">
-            <a:avLst/>
-          </a:prstGeom>
-          <a:noFill/>
-          <a:ln/>
-        </p:spPr>
-        <p:txBody>
-          <a:bodyPr wrap="square" rtlCol="0" anchor="ctr"/>
-          <a:lstStyle/>
-          <a:p>
-            <a:pPr marL="0" indent="0">
-              <a:buNone/>
-            </a:pPr>
-            <a:r>
-              <a:rPr lang="en-US" sz="1100" b="1" dirty="0">
-                <a:solidFill>
-                  <a:srgbClr val="546E7A"/>
-                </a:solidFill>
-              </a:rPr>
-              <a:t>Data Type</a:t>
-            </a:r>
-            <a:endParaRPr lang="en-US" sz="1100" dirty="0"/>
-          </a:p>
-        </p:txBody>
-      </p:sp>
-      <p:sp>
-        <p:nvSpPr>
-          <p:cNvPr id="26" name="Shape 24"/>
-          <p:cNvSpPr/>
-          <p:nvPr/>
-        </p:nvSpPr>
-        <p:spPr>
-          <a:xfrm>
-            <a:off x="4709160" y="1664208"/>
-            <a:ext cx="4114800" cy="292608"/>
-          </a:xfrm>
-          <a:prstGeom prst="rect">
-            <a:avLst/>
-          </a:prstGeom>
-          <a:solidFill>
-            <a:srgbClr val="FFFFFF"/>
-          </a:solidFill>
-          <a:ln w="12700">
-            <a:solidFill>
-              <a:srgbClr val="E0E0E0"/>
-            </a:solidFill>
-            <a:prstDash val="solid"/>
-          </a:ln>
-        </p:spPr>
-      </p:sp>
-      <p:sp>
-        <p:nvSpPr>
-          <p:cNvPr id="27" name="Text 25"/>
-          <p:cNvSpPr/>
-          <p:nvPr/>
-        </p:nvSpPr>
-        <p:spPr>
-          <a:xfrm>
-            <a:off x="4800600" y="1664208"/>
-            <a:ext cx="2194560" cy="292608"/>
-          </a:xfrm>
-          <a:prstGeom prst="rect">
-            <a:avLst/>
-          </a:prstGeom>
-          <a:noFill/>
-          <a:ln/>
-        </p:spPr>
-        <p:txBody>
-          <a:bodyPr wrap="square" rtlCol="0" anchor="ctr"/>
-          <a:lstStyle/>
-          <a:p>
-            <a:pPr marL="0" indent="0">
-              <a:buNone/>
-            </a:pPr>
-            <a:r>
-              <a:rPr lang="en-US" sz="1100" dirty="0">
-                <a:solidFill>
-                  <a:srgbClr val="1B1B1B"/>
-                </a:solidFill>
-              </a:rPr>
-              <a:t>P_ID</a:t>
-            </a:r>
-            <a:endParaRPr lang="en-US" sz="1100" dirty="0"/>
-          </a:p>
-        </p:txBody>
-      </p:sp>
-      <p:sp>
-        <p:nvSpPr>
-          <p:cNvPr id="28" name="Text 26"/>
-          <p:cNvSpPr/>
-          <p:nvPr/>
-        </p:nvSpPr>
-        <p:spPr>
-          <a:xfrm>
-            <a:off x="6995160" y="1664208"/>
-            <a:ext cx="1828800" cy="292608"/>
-          </a:xfrm>
-          <a:prstGeom prst="rect">
-            <a:avLst/>
-          </a:prstGeom>
-          <a:noFill/>
-          <a:ln/>
-        </p:spPr>
-        <p:txBody>
-          <a:bodyPr wrap="square" rtlCol="0" anchor="ctr"/>
-          <a:lstStyle/>
-          <a:p>
-            <a:pPr marL="0" indent="0">
-              <a:buNone/>
-            </a:pPr>
-            <a:r>
-              <a:rPr lang="en-US" sz="1100" dirty="0">
-                <a:solidFill>
-                  <a:srgbClr val="546E7A"/>
-                </a:solidFill>
-              </a:rPr>
-              <a:t>NUMBER(20)</a:t>
-            </a:r>
-            <a:endParaRPr lang="en-US" sz="1100" dirty="0"/>
-          </a:p>
-        </p:txBody>
-      </p:sp>
-      <p:sp>
-        <p:nvSpPr>
-          <p:cNvPr id="29" name="Shape 27"/>
-          <p:cNvSpPr/>
-          <p:nvPr/>
-        </p:nvSpPr>
-        <p:spPr>
-          <a:xfrm>
-            <a:off x="4709160" y="1956816"/>
-            <a:ext cx="4114800" cy="292608"/>
-          </a:xfrm>
-          <a:prstGeom prst="rect">
-            <a:avLst/>
-          </a:prstGeom>
-          <a:solidFill>
-            <a:srgbClr val="E8F5E9"/>
-          </a:solidFill>
-          <a:ln w="12700">
-            <a:solidFill>
-              <a:srgbClr val="E0E0E0"/>
-            </a:solidFill>
-            <a:prstDash val="solid"/>
-          </a:ln>
-        </p:spPr>
-      </p:sp>
-      <p:sp>
-        <p:nvSpPr>
-          <p:cNvPr id="30" name="Text 28"/>
-          <p:cNvSpPr/>
-          <p:nvPr/>
-        </p:nvSpPr>
-        <p:spPr>
-          <a:xfrm>
-            <a:off x="4800600" y="1956816"/>
-            <a:ext cx="2194560" cy="292608"/>
-          </a:xfrm>
-          <a:prstGeom prst="rect">
-            <a:avLst/>
-          </a:prstGeom>
-          <a:noFill/>
-          <a:ln/>
-        </p:spPr>
-        <p:txBody>
-          <a:bodyPr wrap="square" rtlCol="0" anchor="ctr"/>
-          <a:lstStyle/>
-          <a:p>
-            <a:pPr marL="0" indent="0">
-              <a:buNone/>
-            </a:pPr>
-            <a:r>
-              <a:rPr lang="en-US" sz="1100" dirty="0">
-                <a:solidFill>
-                  <a:srgbClr val="1B1B1B"/>
-                </a:solidFill>
-              </a:rPr>
-              <a:t>P_name</a:t>
-            </a:r>
-            <a:endParaRPr lang="en-US" sz="1100" dirty="0"/>
-          </a:p>
-        </p:txBody>
-      </p:sp>
-      <p:sp>
-        <p:nvSpPr>
-          <p:cNvPr id="31" name="Text 29"/>
-          <p:cNvSpPr/>
-          <p:nvPr/>
-        </p:nvSpPr>
-        <p:spPr>
-          <a:xfrm>
-            <a:off x="6995160" y="1956816"/>
-            <a:ext cx="1828800" cy="292608"/>
-          </a:xfrm>
-          <a:prstGeom prst="rect">
-            <a:avLst/>
-          </a:prstGeom>
-          <a:noFill/>
-          <a:ln/>
-        </p:spPr>
-        <p:txBody>
-          <a:bodyPr wrap="square" rtlCol="0" anchor="ctr"/>
-          <a:lstStyle/>
-          <a:p>
-            <a:pPr marL="0" indent="0">
-              <a:buNone/>
-            </a:pPr>
-            <a:r>
-              <a:rPr lang="en-US" sz="1100" dirty="0">
-                <a:solidFill>
-                  <a:srgbClr val="546E7A"/>
-                </a:solidFill>
-              </a:rPr>
-              <a:t>VARCHAR(20)</a:t>
-            </a:r>
-            <a:endParaRPr lang="en-US" sz="1100" dirty="0"/>
-          </a:p>
-        </p:txBody>
-      </p:sp>
-      <p:sp>
-        <p:nvSpPr>
-          <p:cNvPr id="32" name="Shape 30"/>
-          <p:cNvSpPr/>
-          <p:nvPr/>
-        </p:nvSpPr>
-        <p:spPr>
-          <a:xfrm>
-            <a:off x="4709160" y="2249424"/>
-            <a:ext cx="4114800" cy="292608"/>
-          </a:xfrm>
-          <a:prstGeom prst="rect">
-            <a:avLst/>
-          </a:prstGeom>
-          <a:solidFill>
-            <a:srgbClr val="FFFFFF"/>
-          </a:solidFill>
-          <a:ln w="12700">
-            <a:solidFill>
-              <a:srgbClr val="E0E0E0"/>
-            </a:solidFill>
-            <a:prstDash val="solid"/>
-          </a:ln>
-        </p:spPr>
-      </p:sp>
-      <p:sp>
-        <p:nvSpPr>
-          <p:cNvPr id="33" name="Text 31"/>
-          <p:cNvSpPr/>
-          <p:nvPr/>
-        </p:nvSpPr>
-        <p:spPr>
-          <a:xfrm>
-            <a:off x="4800600" y="2249424"/>
-            <a:ext cx="2194560" cy="292608"/>
-          </a:xfrm>
-          <a:prstGeom prst="rect">
-            <a:avLst/>
-          </a:prstGeom>
-          <a:noFill/>
-          <a:ln/>
-        </p:spPr>
-        <p:txBody>
-          <a:bodyPr wrap="square" rtlCol="0" anchor="ctr"/>
-          <a:lstStyle/>
-          <a:p>
-            <a:pPr marL="0" indent="0">
-              <a:buNone/>
-            </a:pPr>
-            <a:r>
-              <a:rPr lang="en-US" sz="1100" dirty="0">
-                <a:solidFill>
-                  <a:srgbClr val="1B1B1B"/>
-                </a:solidFill>
-              </a:rPr>
-              <a:t>P_price</a:t>
-            </a:r>
-            <a:endParaRPr lang="en-US" sz="1100" dirty="0"/>
-          </a:p>
-        </p:txBody>
-      </p:sp>
-      <p:sp>
-        <p:nvSpPr>
-          <p:cNvPr id="34" name="Text 32"/>
-          <p:cNvSpPr/>
-          <p:nvPr/>
-        </p:nvSpPr>
-        <p:spPr>
-          <a:xfrm>
-            <a:off x="6995160" y="2249424"/>
-            <a:ext cx="1828800" cy="292608"/>
-          </a:xfrm>
-          <a:prstGeom prst="rect">
-            <a:avLst/>
-          </a:prstGeom>
-          <a:noFill/>
-          <a:ln/>
-        </p:spPr>
-        <p:txBody>
-          <a:bodyPr wrap="square" rtlCol="0" anchor="ctr"/>
-          <a:lstStyle/>
-          <a:p>
-            <a:pPr marL="0" indent="0">
-              <a:buNone/>
-            </a:pPr>
-            <a:r>
-              <a:rPr lang="en-US" sz="1100" dirty="0">
-                <a:solidFill>
-                  <a:srgbClr val="546E7A"/>
-                </a:solidFill>
-              </a:rPr>
-              <a:t>NUMBER(20)</a:t>
-            </a:r>
-            <a:endParaRPr lang="en-US" sz="1100" dirty="0"/>
-          </a:p>
-        </p:txBody>
-      </p:sp>
-      <p:sp>
-        <p:nvSpPr>
-          <p:cNvPr id="35" name="Shape 33"/>
-          <p:cNvSpPr/>
-          <p:nvPr/>
-        </p:nvSpPr>
-        <p:spPr>
-          <a:xfrm>
-            <a:off x="4709160" y="2542032"/>
-            <a:ext cx="4114800" cy="292608"/>
-          </a:xfrm>
-          <a:prstGeom prst="rect">
-            <a:avLst/>
-          </a:prstGeom>
-          <a:solidFill>
-            <a:srgbClr val="E8F5E9"/>
-          </a:solidFill>
-          <a:ln w="12700">
-            <a:solidFill>
-              <a:srgbClr val="E0E0E0"/>
-            </a:solidFill>
-            <a:prstDash val="solid"/>
-          </a:ln>
-        </p:spPr>
-      </p:sp>
-      <p:sp>
-        <p:nvSpPr>
-          <p:cNvPr id="36" name="Text 34"/>
-          <p:cNvSpPr/>
-          <p:nvPr/>
-        </p:nvSpPr>
-        <p:spPr>
-          <a:xfrm>
-            <a:off x="4800600" y="2542032"/>
-            <a:ext cx="2194560" cy="292608"/>
-          </a:xfrm>
-          <a:prstGeom prst="rect">
-            <a:avLst/>
-          </a:prstGeom>
-          <a:noFill/>
-          <a:ln/>
-        </p:spPr>
-        <p:txBody>
-          <a:bodyPr wrap="square" rtlCol="0" anchor="ctr"/>
-          <a:lstStyle/>
-          <a:p>
-            <a:pPr marL="0" indent="0">
-              <a:buNone/>
-            </a:pPr>
-            <a:r>
-              <a:rPr lang="en-US" sz="1100" dirty="0">
-                <a:solidFill>
-                  <a:srgbClr val="1B1B1B"/>
-                </a:solidFill>
-              </a:rPr>
-              <a:t>P_model</a:t>
-            </a:r>
-            <a:endParaRPr lang="en-US" sz="1100" dirty="0"/>
-          </a:p>
-        </p:txBody>
-      </p:sp>
-      <p:sp>
-        <p:nvSpPr>
-          <p:cNvPr id="37" name="Text 35"/>
-          <p:cNvSpPr/>
-          <p:nvPr/>
-        </p:nvSpPr>
-        <p:spPr>
-          <a:xfrm>
-            <a:off x="6995160" y="2542032"/>
-            <a:ext cx="1828800" cy="292608"/>
-          </a:xfrm>
-          <a:prstGeom prst="rect">
-            <a:avLst/>
-          </a:prstGeom>
-          <a:noFill/>
-          <a:ln/>
-        </p:spPr>
-        <p:txBody>
-          <a:bodyPr wrap="square" rtlCol="0" anchor="ctr"/>
-          <a:lstStyle/>
-          <a:p>
-            <a:pPr marL="0" indent="0">
-              <a:buNone/>
-            </a:pPr>
-            <a:r>
-              <a:rPr lang="en-US" sz="1100" dirty="0">
-                <a:solidFill>
-                  <a:srgbClr val="546E7A"/>
-                </a:solidFill>
-              </a:rPr>
-              <a:t>VARCHAR(20)</a:t>
-            </a:r>
-            <a:endParaRPr lang="en-US" sz="1100" dirty="0"/>
-          </a:p>
-        </p:txBody>
-      </p:sp>
-      <p:sp>
-        <p:nvSpPr>
-          <p:cNvPr id="38" name="Shape 36"/>
-          <p:cNvSpPr/>
-          <p:nvPr/>
-        </p:nvSpPr>
-        <p:spPr>
-          <a:xfrm>
-            <a:off x="274320" y="3035808"/>
-            <a:ext cx="4114800" cy="384048"/>
-          </a:xfrm>
-          <a:prstGeom prst="rect">
-            <a:avLst/>
-          </a:prstGeom>
-          <a:solidFill>
-            <a:srgbClr val="6A1B9A"/>
-          </a:solidFill>
-          <a:ln w="12700">
-            <a:solidFill>
-              <a:srgbClr val="6A1B9A"/>
-            </a:solidFill>
-            <a:prstDash val="solid"/>
-          </a:ln>
-        </p:spPr>
-      </p:sp>
-      <p:sp>
-        <p:nvSpPr>
-          <p:cNvPr id="39" name="Text 37"/>
-          <p:cNvSpPr/>
-          <p:nvPr/>
-        </p:nvSpPr>
-        <p:spPr>
-          <a:xfrm>
-            <a:off x="365760" y="3035808"/>
-            <a:ext cx="3931920" cy="384048"/>
-          </a:xfrm>
-          <a:prstGeom prst="rect">
-            <a:avLst/>
-          </a:prstGeom>
-          <a:noFill/>
-          <a:ln/>
-        </p:spPr>
-        <p:txBody>
-          <a:bodyPr wrap="square" rtlCol="0" anchor="ctr"/>
-          <a:lstStyle/>
-          <a:p>
-            <a:pPr marL="0" indent="0">
-              <a:buNone/>
-            </a:pPr>
-            <a:r>
-              <a:rPr lang="en-US" sz="1400" b="1" dirty="0">
-                <a:solidFill>
-                  <a:srgbClr val="FFFFFF"/>
-                </a:solidFill>
-              </a:rPr>
-              <a:t>🗂️  Payment</a:t>
-            </a:r>
-            <a:endParaRPr lang="en-US" sz="1400" dirty="0"/>
-          </a:p>
-        </p:txBody>
-      </p:sp>
-      <p:sp>
-        <p:nvSpPr>
-          <p:cNvPr id="40" name="Shape 38"/>
-          <p:cNvSpPr/>
-          <p:nvPr/>
-        </p:nvSpPr>
-        <p:spPr>
-          <a:xfrm>
-            <a:off x="274320" y="3419856"/>
-            <a:ext cx="4114800" cy="274320"/>
-          </a:xfrm>
-          <a:prstGeom prst="rect">
-            <a:avLst/>
-          </a:prstGeom>
-          <a:solidFill>
-            <a:srgbClr val="ECEFF1"/>
-          </a:solidFill>
-          <a:ln w="12700">
-            <a:solidFill>
-              <a:srgbClr val="BDBDBD"/>
-            </a:solidFill>
-            <a:prstDash val="solid"/>
-          </a:ln>
-        </p:spPr>
-      </p:sp>
-      <p:sp>
-        <p:nvSpPr>
-          <p:cNvPr id="41" name="Text 39"/>
-          <p:cNvSpPr/>
-          <p:nvPr/>
-        </p:nvSpPr>
-        <p:spPr>
-          <a:xfrm>
-            <a:off x="365760" y="3419856"/>
-            <a:ext cx="2194560" cy="274320"/>
-          </a:xfrm>
-          <a:prstGeom prst="rect">
-            <a:avLst/>
-          </a:prstGeom>
-          <a:noFill/>
-          <a:ln/>
-        </p:spPr>
-        <p:txBody>
-          <a:bodyPr wrap="square" rtlCol="0" anchor="ctr"/>
-          <a:lstStyle/>
-          <a:p>
-            <a:pPr marL="0" indent="0">
-              <a:buNone/>
-            </a:pPr>
-            <a:r>
-              <a:rPr lang="en-US" sz="1100" b="1" dirty="0">
-                <a:solidFill>
-                  <a:srgbClr val="546E7A"/>
-                </a:solidFill>
-              </a:rPr>
-              <a:t>Field Name</a:t>
-            </a:r>
-            <a:endParaRPr lang="en-US" sz="1100" dirty="0"/>
-          </a:p>
-        </p:txBody>
-      </p:sp>
-      <p:sp>
-        <p:nvSpPr>
-          <p:cNvPr id="42" name="Text 40"/>
-          <p:cNvSpPr/>
-          <p:nvPr/>
-        </p:nvSpPr>
-        <p:spPr>
-          <a:xfrm>
-            <a:off x="2560320" y="3419856"/>
-            <a:ext cx="1828800" cy="274320"/>
-          </a:xfrm>
-          <a:prstGeom prst="rect">
-            <a:avLst/>
-          </a:prstGeom>
-          <a:noFill/>
-          <a:ln/>
-        </p:spPr>
-        <p:txBody>
-          <a:bodyPr wrap="square" rtlCol="0" anchor="ctr"/>
-          <a:lstStyle/>
-          <a:p>
-            <a:pPr marL="0" indent="0">
-              <a:buNone/>
-            </a:pPr>
-            <a:r>
-              <a:rPr lang="en-US" sz="1100" b="1" dirty="0">
-                <a:solidFill>
-                  <a:srgbClr val="546E7A"/>
-                </a:solidFill>
-              </a:rPr>
-              <a:t>Data Type</a:t>
-            </a:r>
-            <a:endParaRPr lang="en-US" sz="1100" dirty="0"/>
-          </a:p>
-        </p:txBody>
-      </p:sp>
-      <p:sp>
-        <p:nvSpPr>
-          <p:cNvPr id="43" name="Shape 41"/>
-          <p:cNvSpPr/>
-          <p:nvPr/>
-        </p:nvSpPr>
-        <p:spPr>
-          <a:xfrm>
-            <a:off x="274320" y="3694176"/>
-            <a:ext cx="4114800" cy="292608"/>
-          </a:xfrm>
-          <a:prstGeom prst="rect">
-            <a:avLst/>
-          </a:prstGeom>
-          <a:solidFill>
-            <a:srgbClr val="FFFFFF"/>
-          </a:solidFill>
-          <a:ln w="12700">
-            <a:solidFill>
-              <a:srgbClr val="E0E0E0"/>
-            </a:solidFill>
-            <a:prstDash val="solid"/>
-          </a:ln>
-        </p:spPr>
-      </p:sp>
-      <p:sp>
-        <p:nvSpPr>
-          <p:cNvPr id="44" name="Text 42"/>
-          <p:cNvSpPr/>
-          <p:nvPr/>
-        </p:nvSpPr>
-        <p:spPr>
-          <a:xfrm>
-            <a:off x="365760" y="3694176"/>
-            <a:ext cx="2194560" cy="292608"/>
-          </a:xfrm>
-          <a:prstGeom prst="rect">
-            <a:avLst/>
-          </a:prstGeom>
-          <a:noFill/>
-          <a:ln/>
-        </p:spPr>
-        <p:txBody>
-          <a:bodyPr wrap="square" rtlCol="0" anchor="ctr"/>
-          <a:lstStyle/>
-          <a:p>
-            <a:pPr marL="0" indent="0">
-              <a:buNone/>
-            </a:pPr>
-            <a:r>
-              <a:rPr lang="en-US" sz="1100" dirty="0">
-                <a:solidFill>
-                  <a:srgbClr val="1B1B1B"/>
-                </a:solidFill>
-              </a:rPr>
-              <a:t>payment_id</a:t>
-            </a:r>
-            <a:endParaRPr lang="en-US" sz="1100" dirty="0"/>
-          </a:p>
-        </p:txBody>
-      </p:sp>
-      <p:sp>
-        <p:nvSpPr>
-          <p:cNvPr id="45" name="Text 43"/>
-          <p:cNvSpPr/>
-          <p:nvPr/>
-        </p:nvSpPr>
-        <p:spPr>
-          <a:xfrm>
-            <a:off x="2560320" y="3694176"/>
-            <a:ext cx="1828800" cy="292608"/>
-          </a:xfrm>
-          <a:prstGeom prst="rect">
-            <a:avLst/>
-          </a:prstGeom>
-          <a:noFill/>
-          <a:ln/>
-        </p:spPr>
-        <p:txBody>
-          <a:bodyPr wrap="square" rtlCol="0" anchor="ctr"/>
-          <a:lstStyle/>
-          <a:p>
-            <a:pPr marL="0" indent="0">
-              <a:buNone/>
-            </a:pPr>
-            <a:r>
-              <a:rPr lang="en-US" sz="1100" dirty="0">
-                <a:solidFill>
-                  <a:srgbClr val="546E7A"/>
-                </a:solidFill>
-              </a:rPr>
-              <a:t>NUMBER(20)</a:t>
-            </a:r>
-            <a:endParaRPr lang="en-US" sz="1100" dirty="0"/>
-          </a:p>
-        </p:txBody>
-      </p:sp>
-      <p:sp>
-        <p:nvSpPr>
-          <p:cNvPr id="46" name="Shape 44"/>
-          <p:cNvSpPr/>
-          <p:nvPr/>
-        </p:nvSpPr>
-        <p:spPr>
-          <a:xfrm>
-            <a:off x="274320" y="3986784"/>
-            <a:ext cx="4114800" cy="292608"/>
-          </a:xfrm>
-          <a:prstGeom prst="rect">
-            <a:avLst/>
-          </a:prstGeom>
-          <a:solidFill>
-            <a:srgbClr val="E8F5E9"/>
-          </a:solidFill>
-          <a:ln w="12700">
-            <a:solidFill>
-              <a:srgbClr val="E0E0E0"/>
-            </a:solidFill>
-            <a:prstDash val="solid"/>
-          </a:ln>
-        </p:spPr>
-      </p:sp>
-      <p:sp>
-        <p:nvSpPr>
-          <p:cNvPr id="47" name="Text 45"/>
-          <p:cNvSpPr/>
-          <p:nvPr/>
-        </p:nvSpPr>
-        <p:spPr>
-          <a:xfrm>
-            <a:off x="365760" y="3986784"/>
-            <a:ext cx="2194560" cy="292608"/>
-          </a:xfrm>
-          <a:prstGeom prst="rect">
-            <a:avLst/>
-          </a:prstGeom>
-          <a:noFill/>
-          <a:ln/>
-        </p:spPr>
-        <p:txBody>
-          <a:bodyPr wrap="square" rtlCol="0" anchor="ctr"/>
-          <a:lstStyle/>
-          <a:p>
-            <a:pPr marL="0" indent="0">
-              <a:buNone/>
-            </a:pPr>
-            <a:r>
-              <a:rPr lang="en-US" sz="1100" dirty="0">
-                <a:solidFill>
-                  <a:srgbClr val="1B1B1B"/>
-                </a:solidFill>
-              </a:rPr>
-              <a:t>amount</a:t>
-            </a:r>
-            <a:endParaRPr lang="en-US" sz="1100" dirty="0"/>
-          </a:p>
-        </p:txBody>
-      </p:sp>
-      <p:sp>
-        <p:nvSpPr>
-          <p:cNvPr id="48" name="Text 46"/>
-          <p:cNvSpPr/>
-          <p:nvPr/>
-        </p:nvSpPr>
-        <p:spPr>
-          <a:xfrm>
-            <a:off x="2560320" y="3986784"/>
-            <a:ext cx="1828800" cy="292608"/>
-          </a:xfrm>
-          <a:prstGeom prst="rect">
-            <a:avLst/>
-          </a:prstGeom>
-          <a:noFill/>
-          <a:ln/>
-        </p:spPr>
-        <p:txBody>
-          <a:bodyPr wrap="square" rtlCol="0" anchor="ctr"/>
-          <a:lstStyle/>
-          <a:p>
-            <a:pPr marL="0" indent="0">
-              <a:buNone/>
-            </a:pPr>
-            <a:r>
-              <a:rPr lang="en-US" sz="1100" dirty="0">
-                <a:solidFill>
-                  <a:srgbClr val="546E7A"/>
-                </a:solidFill>
-              </a:rPr>
-              <a:t>NUMBER(20)</a:t>
-            </a:r>
-            <a:endParaRPr lang="en-US" sz="1100" dirty="0"/>
-          </a:p>
-        </p:txBody>
-      </p:sp>
-      <p:sp>
-        <p:nvSpPr>
-          <p:cNvPr id="49" name="Shape 47"/>
-          <p:cNvSpPr/>
-          <p:nvPr/>
-        </p:nvSpPr>
-        <p:spPr>
-          <a:xfrm>
-            <a:off x="274320" y="4279392"/>
-            <a:ext cx="4114800" cy="292608"/>
-          </a:xfrm>
-          <a:prstGeom prst="rect">
-            <a:avLst/>
-          </a:prstGeom>
-          <a:solidFill>
-            <a:srgbClr val="FFFFFF"/>
-          </a:solidFill>
-          <a:ln w="12700">
-            <a:solidFill>
-              <a:srgbClr val="E0E0E0"/>
-            </a:solidFill>
-            <a:prstDash val="solid"/>
-          </a:ln>
-        </p:spPr>
-      </p:sp>
-      <p:sp>
-        <p:nvSpPr>
-          <p:cNvPr id="50" name="Text 48"/>
-          <p:cNvSpPr/>
-          <p:nvPr/>
-        </p:nvSpPr>
-        <p:spPr>
-          <a:xfrm>
-            <a:off x="365760" y="4279392"/>
-            <a:ext cx="2194560" cy="292608"/>
-          </a:xfrm>
-          <a:prstGeom prst="rect">
-            <a:avLst/>
-          </a:prstGeom>
-          <a:noFill/>
-          <a:ln/>
-        </p:spPr>
-        <p:txBody>
-          <a:bodyPr wrap="square" rtlCol="0" anchor="ctr"/>
-          <a:lstStyle/>
-          <a:p>
-            <a:pPr marL="0" indent="0">
-              <a:buNone/>
-            </a:pPr>
-            <a:r>
-              <a:rPr lang="en-US" sz="1100" dirty="0">
-                <a:solidFill>
-                  <a:srgbClr val="1B1B1B"/>
-                </a:solidFill>
-              </a:rPr>
-              <a:t>payment_type</a:t>
-            </a:r>
-            <a:endParaRPr lang="en-US" sz="1100" dirty="0"/>
-          </a:p>
-        </p:txBody>
-      </p:sp>
-      <p:sp>
-        <p:nvSpPr>
-          <p:cNvPr id="51" name="Text 49"/>
-          <p:cNvSpPr/>
-          <p:nvPr/>
-        </p:nvSpPr>
-        <p:spPr>
-          <a:xfrm>
-            <a:off x="2560320" y="4279392"/>
-            <a:ext cx="1828800" cy="292608"/>
-          </a:xfrm>
-          <a:prstGeom prst="rect">
-            <a:avLst/>
-          </a:prstGeom>
-          <a:noFill/>
-          <a:ln/>
-        </p:spPr>
-        <p:txBody>
-          <a:bodyPr wrap="square" rtlCol="0" anchor="ctr"/>
-          <a:lstStyle/>
-          <a:p>
-            <a:pPr marL="0" indent="0">
-              <a:buNone/>
-            </a:pPr>
-            <a:r>
-              <a:rPr lang="en-US" sz="1100" dirty="0">
-                <a:solidFill>
-                  <a:srgbClr val="546E7A"/>
-                </a:solidFill>
-              </a:rPr>
-              <a:t>VARCHAR(20)</a:t>
-            </a:r>
-            <a:endParaRPr lang="en-US" sz="1100" dirty="0"/>
-          </a:p>
-        </p:txBody>
-      </p:sp>
-      <p:sp>
-        <p:nvSpPr>
-          <p:cNvPr id="52" name="Shape 50"/>
-          <p:cNvSpPr/>
-          <p:nvPr/>
-        </p:nvSpPr>
-        <p:spPr>
-          <a:xfrm>
-            <a:off x="4709160" y="3035808"/>
-            <a:ext cx="4114800" cy="384048"/>
-          </a:xfrm>
-          <a:prstGeom prst="rect">
-            <a:avLst/>
-          </a:prstGeom>
-          <a:solidFill>
-            <a:srgbClr val="F57C00"/>
-          </a:solidFill>
-          <a:ln w="12700">
-            <a:solidFill>
-              <a:srgbClr val="F57C00"/>
-            </a:solidFill>
-            <a:prstDash val="solid"/>
-          </a:ln>
-        </p:spPr>
-      </p:sp>
-      <p:sp>
-        <p:nvSpPr>
-          <p:cNvPr id="53" name="Text 51"/>
-          <p:cNvSpPr/>
-          <p:nvPr/>
-        </p:nvSpPr>
-        <p:spPr>
-          <a:xfrm>
-            <a:off x="4800600" y="3035808"/>
-            <a:ext cx="3931920" cy="384048"/>
-          </a:xfrm>
-          <a:prstGeom prst="rect">
-            <a:avLst/>
-          </a:prstGeom>
-          <a:noFill/>
-          <a:ln/>
-        </p:spPr>
-        <p:txBody>
-          <a:bodyPr wrap="square" rtlCol="0" anchor="ctr"/>
-          <a:lstStyle/>
-          <a:p>
-            <a:pPr marL="0" indent="0">
-              <a:buNone/>
-            </a:pPr>
-            <a:r>
-              <a:rPr lang="en-US" sz="1400" b="1" dirty="0">
-                <a:solidFill>
-                  <a:srgbClr val="FFFFFF"/>
-                </a:solidFill>
-              </a:rPr>
-              <a:t>🗂️  Cart Item</a:t>
-            </a:r>
-            <a:endParaRPr lang="en-US" sz="1400" dirty="0"/>
-          </a:p>
-        </p:txBody>
-      </p:sp>
-      <p:sp>
-        <p:nvSpPr>
-          <p:cNvPr id="54" name="Shape 52"/>
-          <p:cNvSpPr/>
-          <p:nvPr/>
-        </p:nvSpPr>
-        <p:spPr>
-          <a:xfrm>
-            <a:off x="4709160" y="3419856"/>
-            <a:ext cx="4114800" cy="274320"/>
-          </a:xfrm>
-          <a:prstGeom prst="rect">
-            <a:avLst/>
-          </a:prstGeom>
-          <a:solidFill>
-            <a:srgbClr val="ECEFF1"/>
-          </a:solidFill>
-          <a:ln w="12700">
-            <a:solidFill>
-              <a:srgbClr val="BDBDBD"/>
-            </a:solidFill>
-            <a:prstDash val="solid"/>
-          </a:ln>
-        </p:spPr>
-      </p:sp>
-      <p:sp>
-        <p:nvSpPr>
-          <p:cNvPr id="55" name="Text 53"/>
-          <p:cNvSpPr/>
-          <p:nvPr/>
-        </p:nvSpPr>
-        <p:spPr>
-          <a:xfrm>
-            <a:off x="4800600" y="3419856"/>
-            <a:ext cx="2194560" cy="274320"/>
-          </a:xfrm>
-          <a:prstGeom prst="rect">
-            <a:avLst/>
-          </a:prstGeom>
-          <a:noFill/>
-          <a:ln/>
-        </p:spPr>
-        <p:txBody>
-          <a:bodyPr wrap="square" rtlCol="0" anchor="ctr"/>
-          <a:lstStyle/>
-          <a:p>
-            <a:pPr marL="0" indent="0">
-              <a:buNone/>
-            </a:pPr>
-            <a:r>
-              <a:rPr lang="en-US" sz="1100" b="1" dirty="0">
-                <a:solidFill>
-                  <a:srgbClr val="546E7A"/>
-                </a:solidFill>
-              </a:rPr>
-              <a:t>Field Name</a:t>
-            </a:r>
-            <a:endParaRPr lang="en-US" sz="1100" dirty="0"/>
-          </a:p>
-        </p:txBody>
-      </p:sp>
-      <p:sp>
-        <p:nvSpPr>
-          <p:cNvPr id="56" name="Text 54"/>
-          <p:cNvSpPr/>
-          <p:nvPr/>
-        </p:nvSpPr>
-        <p:spPr>
-          <a:xfrm>
-            <a:off x="6995160" y="3419856"/>
-            <a:ext cx="1828800" cy="274320"/>
-          </a:xfrm>
-          <a:prstGeom prst="rect">
-            <a:avLst/>
-          </a:prstGeom>
-          <a:noFill/>
-          <a:ln/>
-        </p:spPr>
-        <p:txBody>
-          <a:bodyPr wrap="square" rtlCol="0" anchor="ctr"/>
-          <a:lstStyle/>
-          <a:p>
-            <a:pPr marL="0" indent="0">
-              <a:buNone/>
-            </a:pPr>
-            <a:r>
-              <a:rPr lang="en-US" sz="1100" b="1" dirty="0">
-                <a:solidFill>
-                  <a:srgbClr val="546E7A"/>
-                </a:solidFill>
-              </a:rPr>
-              <a:t>Data Type</a:t>
-            </a:r>
-            <a:endParaRPr lang="en-US" sz="1100" dirty="0"/>
-          </a:p>
-        </p:txBody>
-      </p:sp>
-      <p:sp>
-        <p:nvSpPr>
-          <p:cNvPr id="57" name="Shape 55"/>
-          <p:cNvSpPr/>
-          <p:nvPr/>
-        </p:nvSpPr>
-        <p:spPr>
-          <a:xfrm>
-            <a:off x="4709160" y="3694176"/>
-            <a:ext cx="4114800" cy="292608"/>
-          </a:xfrm>
-          <a:prstGeom prst="rect">
-            <a:avLst/>
-          </a:prstGeom>
-          <a:solidFill>
-            <a:srgbClr val="FFFFFF"/>
-          </a:solidFill>
-          <a:ln w="12700">
-            <a:solidFill>
-              <a:srgbClr val="E0E0E0"/>
-            </a:solidFill>
-            <a:prstDash val="solid"/>
-          </a:ln>
-        </p:spPr>
-      </p:sp>
-      <p:sp>
-        <p:nvSpPr>
-          <p:cNvPr id="58" name="Text 56"/>
-          <p:cNvSpPr/>
-          <p:nvPr/>
-        </p:nvSpPr>
-        <p:spPr>
-          <a:xfrm>
-            <a:off x="4800600" y="3694176"/>
-            <a:ext cx="2194560" cy="292608"/>
-          </a:xfrm>
-          <a:prstGeom prst="rect">
-            <a:avLst/>
-          </a:prstGeom>
-          <a:noFill/>
-          <a:ln/>
-        </p:spPr>
-        <p:txBody>
-          <a:bodyPr wrap="square" rtlCol="0" anchor="ctr"/>
-          <a:lstStyle/>
-          <a:p>
-            <a:pPr marL="0" indent="0">
-              <a:buNone/>
-            </a:pPr>
-            <a:r>
-              <a:rPr lang="en-US" sz="1100" dirty="0">
-                <a:solidFill>
-                  <a:srgbClr val="1B1B1B"/>
-                </a:solidFill>
-              </a:rPr>
-              <a:t>cart_id</a:t>
-            </a:r>
-            <a:endParaRPr lang="en-US" sz="1100" dirty="0"/>
-          </a:p>
-        </p:txBody>
-      </p:sp>
-      <p:sp>
-        <p:nvSpPr>
-          <p:cNvPr id="59" name="Text 57"/>
-          <p:cNvSpPr/>
-          <p:nvPr/>
-        </p:nvSpPr>
-        <p:spPr>
-          <a:xfrm>
-            <a:off x="6995160" y="3694176"/>
-            <a:ext cx="1828800" cy="292608"/>
-          </a:xfrm>
-          <a:prstGeom prst="rect">
-            <a:avLst/>
-          </a:prstGeom>
-          <a:noFill/>
-          <a:ln/>
-        </p:spPr>
-        <p:txBody>
-          <a:bodyPr wrap="square" rtlCol="0" anchor="ctr"/>
-          <a:lstStyle/>
-          <a:p>
-            <a:pPr marL="0" indent="0">
-              <a:buNone/>
-            </a:pPr>
-            <a:r>
-              <a:rPr lang="en-US" sz="1100" dirty="0">
-                <a:solidFill>
-                  <a:srgbClr val="546E7A"/>
-                </a:solidFill>
-              </a:rPr>
-              <a:t>NUMBER(20)</a:t>
-            </a:r>
-            <a:endParaRPr lang="en-US" sz="1100" dirty="0"/>
-          </a:p>
-        </p:txBody>
-      </p:sp>
-      <p:sp>
-        <p:nvSpPr>
-          <p:cNvPr id="60" name="Shape 58"/>
-          <p:cNvSpPr/>
-          <p:nvPr/>
-        </p:nvSpPr>
-        <p:spPr>
-          <a:xfrm>
-            <a:off x="4709160" y="3986784"/>
-            <a:ext cx="4114800" cy="292608"/>
-          </a:xfrm>
-          <a:prstGeom prst="rect">
-            <a:avLst/>
-          </a:prstGeom>
-          <a:solidFill>
-            <a:srgbClr val="E8F5E9"/>
-          </a:solidFill>
-          <a:ln w="12700">
-            <a:solidFill>
-              <a:srgbClr val="E0E0E0"/>
-            </a:solidFill>
-            <a:prstDash val="solid"/>
-          </a:ln>
-        </p:spPr>
-      </p:sp>
-      <p:sp>
-        <p:nvSpPr>
-          <p:cNvPr id="61" name="Text 59"/>
-          <p:cNvSpPr/>
-          <p:nvPr/>
-        </p:nvSpPr>
-        <p:spPr>
-          <a:xfrm>
-            <a:off x="4800600" y="3986784"/>
-            <a:ext cx="2194560" cy="292608"/>
-          </a:xfrm>
-          <a:prstGeom prst="rect">
-            <a:avLst/>
-          </a:prstGeom>
-          <a:noFill/>
-          <a:ln/>
-        </p:spPr>
-        <p:txBody>
-          <a:bodyPr wrap="square" rtlCol="0" anchor="ctr"/>
-          <a:lstStyle/>
-          <a:p>
-            <a:pPr marL="0" indent="0">
-              <a:buNone/>
-            </a:pPr>
-            <a:r>
-              <a:rPr lang="en-US" sz="1100" dirty="0">
-                <a:solidFill>
-                  <a:srgbClr val="1B1B1B"/>
-                </a:solidFill>
-              </a:rPr>
-              <a:t>total_cost</a:t>
-            </a:r>
-            <a:endParaRPr lang="en-US" sz="1100" dirty="0"/>
-          </a:p>
-        </p:txBody>
-      </p:sp>
-      <p:sp>
-        <p:nvSpPr>
-          <p:cNvPr id="62" name="Text 60"/>
-          <p:cNvSpPr/>
-          <p:nvPr/>
-        </p:nvSpPr>
-        <p:spPr>
-          <a:xfrm>
-            <a:off x="6995160" y="3986784"/>
-            <a:ext cx="1828800" cy="292608"/>
-          </a:xfrm>
-          <a:prstGeom prst="rect">
-            <a:avLst/>
-          </a:prstGeom>
-          <a:noFill/>
-          <a:ln/>
-        </p:spPr>
-        <p:txBody>
-          <a:bodyPr wrap="square" rtlCol="0" anchor="ctr"/>
-          <a:lstStyle/>
-          <a:p>
-            <a:pPr marL="0" indent="0">
-              <a:buNone/>
-            </a:pPr>
-            <a:r>
-              <a:rPr lang="en-US" sz="1100" dirty="0">
-                <a:solidFill>
-                  <a:srgbClr val="546E7A"/>
-                </a:solidFill>
-              </a:rPr>
-              <a:t>NUMBER(20)</a:t>
-            </a:r>
-            <a:endParaRPr lang="en-US" sz="1100" dirty="0"/>
-          </a:p>
-        </p:txBody>
-      </p:sp>
-      <p:sp>
-        <p:nvSpPr>
-          <p:cNvPr id="63" name="Shape 61"/>
-          <p:cNvSpPr/>
-          <p:nvPr/>
-        </p:nvSpPr>
-        <p:spPr>
-          <a:xfrm>
-            <a:off x="4709160" y="4279392"/>
-            <a:ext cx="4114800" cy="292608"/>
-          </a:xfrm>
-          <a:prstGeom prst="rect">
-            <a:avLst/>
-          </a:prstGeom>
-          <a:solidFill>
-            <a:srgbClr val="FFFFFF"/>
-          </a:solidFill>
-          <a:ln w="12700">
-            <a:solidFill>
-              <a:srgbClr val="E0E0E0"/>
-            </a:solidFill>
-            <a:prstDash val="solid"/>
-          </a:ln>
-        </p:spPr>
-      </p:sp>
-      <p:sp>
-        <p:nvSpPr>
-          <p:cNvPr id="64" name="Text 62"/>
-          <p:cNvSpPr/>
-          <p:nvPr/>
-        </p:nvSpPr>
-        <p:spPr>
-          <a:xfrm>
-            <a:off x="4800600" y="4279392"/>
-            <a:ext cx="2194560" cy="292608"/>
-          </a:xfrm>
-          <a:prstGeom prst="rect">
-            <a:avLst/>
-          </a:prstGeom>
-          <a:noFill/>
-          <a:ln/>
-        </p:spPr>
-        <p:txBody>
-          <a:bodyPr wrap="square" rtlCol="0" anchor="ctr"/>
-          <a:lstStyle/>
-          <a:p>
-            <a:pPr marL="0" indent="0">
-              <a:buNone/>
-            </a:pPr>
-            <a:r>
-              <a:rPr lang="en-US" sz="1100" dirty="0">
-                <a:solidFill>
-                  <a:srgbClr val="1B1B1B"/>
-                </a:solidFill>
-              </a:rPr>
-              <a:t>quantity</a:t>
-            </a:r>
-            <a:endParaRPr lang="en-US" sz="1100" dirty="0"/>
-          </a:p>
-        </p:txBody>
-      </p:sp>
-      <p:sp>
-        <p:nvSpPr>
-          <p:cNvPr id="65" name="Text 63"/>
-          <p:cNvSpPr/>
-          <p:nvPr/>
-        </p:nvSpPr>
-        <p:spPr>
-          <a:xfrm>
-            <a:off x="6995160" y="4279392"/>
-            <a:ext cx="1828800" cy="292608"/>
-          </a:xfrm>
-          <a:prstGeom prst="rect">
-            <a:avLst/>
-          </a:prstGeom>
-          <a:noFill/>
-          <a:ln/>
-        </p:spPr>
-        <p:txBody>
-          <a:bodyPr wrap="square" rtlCol="0" anchor="ctr"/>
-          <a:lstStyle/>
-          <a:p>
-            <a:pPr marL="0" indent="0">
-              <a:buNone/>
-            </a:pPr>
-            <a:r>
-              <a:rPr lang="en-US" sz="1100" dirty="0">
-                <a:solidFill>
-                  <a:srgbClr val="546E7A"/>
-                </a:solidFill>
-              </a:rPr>
-              <a:t>VARCHAR(20)</a:t>
-            </a:r>
-            <a:endParaRPr lang="en-US" sz="1100" dirty="0"/>
-          </a:p>
-        </p:txBody>
-      </p:sp>
+      <p:pic>
+        <p:nvPicPr>
+          <p:cNvPr id="8" name="Picture 7"/>
+          <p:cNvPicPr>
+            <a:picLocks noChangeAspect="1"/>
+          </p:cNvPicPr>
+          <p:nvPr/>
+        </p:nvPicPr>
+        <p:blipFill>
+          <a:blip r:embed="rId2">
+            <a:extLst>
+              <a:ext uri="{28A0092B-C50C-407E-A947-70E740481C1C}">
+                <a14:useLocalDpi xmlns:a14="http://schemas.microsoft.com/office/drawing/2010/main" val="0"/>
+              </a:ext>
+            </a:extLst>
+          </a:blip>
+          <a:stretch>
+            <a:fillRect/>
+          </a:stretch>
+        </p:blipFill>
+        <p:spPr>
+          <a:xfrm>
+            <a:off x="164462" y="970700"/>
+            <a:ext cx="3986869" cy="2107999"/>
+          </a:xfrm>
+          <a:prstGeom prst="rect">
+            <a:avLst/>
+          </a:prstGeom>
+        </p:spPr>
+      </p:pic>
+      <p:pic>
+        <p:nvPicPr>
+          <p:cNvPr id="9" name="Picture 8"/>
+          <p:cNvPicPr>
+            <a:picLocks noChangeAspect="1"/>
+          </p:cNvPicPr>
+          <p:nvPr/>
+        </p:nvPicPr>
+        <p:blipFill>
+          <a:blip r:embed="rId3">
+            <a:extLst>
+              <a:ext uri="{28A0092B-C50C-407E-A947-70E740481C1C}">
+                <a14:useLocalDpi xmlns:a14="http://schemas.microsoft.com/office/drawing/2010/main" val="0"/>
+              </a:ext>
+            </a:extLst>
+          </a:blip>
+          <a:stretch>
+            <a:fillRect/>
+          </a:stretch>
+        </p:blipFill>
+        <p:spPr>
+          <a:xfrm>
+            <a:off x="4378512" y="970700"/>
+            <a:ext cx="4363300" cy="2107999"/>
+          </a:xfrm>
+          <a:prstGeom prst="rect">
+            <a:avLst/>
+          </a:prstGeom>
+        </p:spPr>
+      </p:pic>
+      <p:pic>
+        <p:nvPicPr>
+          <p:cNvPr id="10" name="Picture 9"/>
+          <p:cNvPicPr>
+            <a:picLocks noChangeAspect="1"/>
+          </p:cNvPicPr>
+          <p:nvPr/>
+        </p:nvPicPr>
+        <p:blipFill>
+          <a:blip r:embed="rId4">
+            <a:extLst>
+              <a:ext uri="{28A0092B-C50C-407E-A947-70E740481C1C}">
+                <a14:useLocalDpi xmlns:a14="http://schemas.microsoft.com/office/drawing/2010/main" val="0"/>
+              </a:ext>
+            </a:extLst>
+          </a:blip>
+          <a:stretch>
+            <a:fillRect/>
+          </a:stretch>
+        </p:blipFill>
+        <p:spPr>
+          <a:xfrm>
+            <a:off x="2441168" y="3236179"/>
+            <a:ext cx="3874688" cy="1841135"/>
+          </a:xfrm>
+          <a:prstGeom prst="rect">
+            <a:avLst/>
+          </a:prstGeom>
+        </p:spPr>
+      </p:pic>
     </p:spTree>
+    <p:extLst>
+      <p:ext uri="{BB962C8B-B14F-4D97-AF65-F5344CB8AC3E}">
+        <p14:creationId xmlns:p14="http://schemas.microsoft.com/office/powerpoint/2010/main" val="1049799831"/>
+      </p:ext>
+    </p:extLst>
   </p:cSld>
   <p:clrMapOvr>
     <a:masterClrMapping/>
   </p:clrMapOvr>
+  <p:timing>
+    <p:tnLst>
+      <p:par>
+        <p:cTn id="1" dur="indefinite" restart="never" nodeType="tmRoot"/>
+      </p:par>
+    </p:tnLst>
+  </p:timing>
 </p:sld>
 </file>
 
@@ -7050,8 +5091,8 @@
         </p:blipFill>
         <p:spPr>
           <a:xfrm>
-            <a:off x="274320" y="2032730"/>
-            <a:ext cx="4023360" cy="2256397"/>
+            <a:off x="274320" y="2203770"/>
+            <a:ext cx="4023360" cy="2006417"/>
           </a:xfrm>
           <a:prstGeom prst="rect">
             <a:avLst/>
@@ -7179,6 +5220,13 @@
   <p:clrMapOvr>
     <a:masterClrMapping/>
   </p:clrMapOvr>
+  <p:timing>
+    <p:tnLst>
+      <p:par>
+        <p:cTn id="1" dur="indefinite" restart="never" nodeType="tmRoot"/>
+      </p:par>
+    </p:tnLst>
+  </p:timing>
 </p:sld>
 </file>
 
@@ -7519,6 +5567,13 @@
   <p:clrMapOvr>
     <a:masterClrMapping/>
   </p:clrMapOvr>
+  <p:timing>
+    <p:tnLst>
+      <p:par>
+        <p:cTn id="1" dur="indefinite" restart="never" nodeType="tmRoot"/>
+      </p:par>
+    </p:tnLst>
+  </p:timing>
 </p:sld>
 </file>
 
@@ -8603,6 +6658,13 @@
   <p:clrMapOvr>
     <a:masterClrMapping/>
   </p:clrMapOvr>
+  <p:timing>
+    <p:tnLst>
+      <p:par>
+        <p:cTn id="1" dur="indefinite" restart="never" nodeType="tmRoot"/>
+      </p:par>
+    </p:tnLst>
+  </p:timing>
 </p:sld>
 </file>
 
@@ -9063,6 +7125,13 @@
   <p:clrMapOvr>
     <a:masterClrMapping/>
   </p:clrMapOvr>
+  <p:timing>
+    <p:tnLst>
+      <p:par>
+        <p:cTn id="1" dur="indefinite" restart="never" nodeType="tmRoot"/>
+      </p:par>
+    </p:tnLst>
+  </p:timing>
 </p:sld>
 </file>
 
@@ -9305,6 +7374,13 @@
   <p:clrMapOvr>
     <a:masterClrMapping/>
   </p:clrMapOvr>
+  <p:timing>
+    <p:tnLst>
+      <p:par>
+        <p:cTn id="1" dur="indefinite" restart="never" nodeType="tmRoot"/>
+      </p:par>
+    </p:tnLst>
+  </p:timing>
 </p:sld>
 </file>
 
@@ -9567,7 +7643,7 @@
         </p:nvSpPr>
         <p:spPr>
           <a:xfrm>
-            <a:off x="4663440" y="1097280"/>
+            <a:off x="4683174" y="1097280"/>
             <a:ext cx="4206240" cy="1645920"/>
           </a:xfrm>
           <a:prstGeom prst="rect">
@@ -10059,6 +8135,13 @@
   <p:clrMapOvr>
     <a:masterClrMapping/>
   </p:clrMapOvr>
+  <p:timing>
+    <p:tnLst>
+      <p:par>
+        <p:cTn id="1" dur="indefinite" restart="never" nodeType="tmRoot"/>
+      </p:par>
+    </p:tnLst>
+  </p:timing>
 </p:sld>
 </file>
 
@@ -10963,6 +9046,13 @@
   <p:clrMapOvr>
     <a:masterClrMapping/>
   </p:clrMapOvr>
+  <p:timing>
+    <p:tnLst>
+      <p:par>
+        <p:cTn id="1" dur="indefinite" restart="never" nodeType="tmRoot"/>
+      </p:par>
+    </p:tnLst>
+  </p:timing>
 </p:sld>
 </file>
 
@@ -11847,6 +9937,13 @@
   <p:clrMapOvr>
     <a:masterClrMapping/>
   </p:clrMapOvr>
+  <p:timing>
+    <p:tnLst>
+      <p:par>
+        <p:cTn id="1" dur="indefinite" restart="never" nodeType="tmRoot"/>
+      </p:par>
+    </p:tnLst>
+  </p:timing>
 </p:sld>
 </file>
 
@@ -12059,7 +10156,23 @@
                   <a:srgbClr val="546E7A"/>
                 </a:solidFill>
               </a:rPr>
-              <a:t>HTML5 • CSS3 • JavaScript</a:t>
+              <a:t>HTML5 • </a:t>
+            </a:r>
+            <a:r>
+              <a:rPr lang="en-US" sz="1300" dirty="0" smtClean="0">
+                <a:solidFill>
+                  <a:srgbClr val="546E7A"/>
+                </a:solidFill>
+              </a:rPr>
+              <a:t>CSS• </a:t>
+            </a:r>
+            <a:r>
+              <a:rPr lang="en-US" sz="1300" dirty="0">
+                <a:solidFill>
+                  <a:srgbClr val="546E7A"/>
+                </a:solidFill>
+              </a:rPr>
+              <a:t>JavaScript</a:t>
             </a:r>
             <a:endParaRPr lang="en-US" sz="1300" dirty="0"/>
           </a:p>
@@ -12188,7 +10301,15 @@
                   <a:srgbClr val="546E7A"/>
                 </a:solidFill>
               </a:rPr>
-              <a:t>Python / Flask or PHP</a:t>
+              <a:t>Python / </a:t>
+            </a:r>
+            <a:r>
+              <a:rPr lang="en-US" sz="1300" dirty="0" smtClean="0">
+                <a:solidFill>
+                  <a:srgbClr val="546E7A"/>
+                </a:solidFill>
+              </a:rPr>
+              <a:t>PHP</a:t>
             </a:r>
             <a:endParaRPr lang="en-US" sz="1300" dirty="0"/>
           </a:p>
@@ -12446,7 +10567,31 @@
                   <a:srgbClr val="546E7A"/>
                 </a:solidFill>
               </a:rPr>
-              <a:t>VS Code • XAMPP • Git</a:t>
+              <a:t>VS Code • </a:t>
+            </a:r>
+            <a:r>
+              <a:rPr lang="en-US" sz="1300" dirty="0" err="1" smtClean="0">
+                <a:solidFill>
+                  <a:srgbClr val="546E7A"/>
+                </a:solidFill>
+              </a:rPr>
+              <a:t>wamp</a:t>
+            </a:r>
+            <a:r>
+              <a:rPr lang="en-US" sz="1300" dirty="0" smtClean="0">
+                <a:solidFill>
+                  <a:srgbClr val="546E7A"/>
+                </a:solidFill>
+              </a:rPr>
+              <a:t>• </a:t>
+            </a:r>
+            <a:r>
+              <a:rPr lang="en-US" sz="1300" dirty="0">
+                <a:solidFill>
+                  <a:srgbClr val="546E7A"/>
+                </a:solidFill>
+              </a:rPr>
+              <a:t>Git</a:t>
             </a:r>
             <a:endParaRPr lang="en-US" sz="1300" dirty="0"/>
           </a:p>
@@ -12583,38 +10728,6 @@
       </p:sp>
       <p:sp>
         <p:nvSpPr>
-          <p:cNvPr id="24" name="Shape 22"/>
-          <p:cNvSpPr/>
-          <p:nvPr/>
-        </p:nvSpPr>
-        <p:spPr>
-          <a:xfrm>
-            <a:off x="6080760" y="2926080"/>
-            <a:ext cx="2697480" cy="1554480"/>
-          </a:xfrm>
-          <a:prstGeom prst="rect">
-            <a:avLst/>
-          </a:prstGeom>
-          <a:solidFill>
-            <a:srgbClr val="FFFFFF"/>
-          </a:solidFill>
-          <a:ln w="12700">
-            <a:solidFill>
-              <a:srgbClr val="E0E0E0"/>
-            </a:solidFill>
-            <a:prstDash val="solid"/>
-          </a:ln>
-          <a:effectLst>
-            <a:outerShdw blurRad="101600" dist="38100" dir="8100000" algn="bl" rotWithShape="0">
-              <a:srgbClr val="000000">
-                <a:alpha val="12000"/>
-              </a:srgbClr>
-            </a:outerShdw>
-          </a:effectLst>
-        </p:spPr>
-      </p:sp>
-      <p:sp>
-        <p:nvSpPr>
           <p:cNvPr id="25" name="Shape 23"/>
           <p:cNvSpPr/>
           <p:nvPr/>
@@ -12704,7 +10817,7 @@
                   <a:srgbClr val="546E7A"/>
                 </a:solidFill>
               </a:rPr>
-              <a:t>Session Auth • Password Hash</a:t>
+              <a:t>Session Auth • Password </a:t>
             </a:r>
             <a:endParaRPr lang="en-US" sz="1300" dirty="0"/>
           </a:p>
@@ -12715,6 +10828,13 @@
   <p:clrMapOvr>
     <a:masterClrMapping/>
   </p:clrMapOvr>
+  <p:timing>
+    <p:tnLst>
+      <p:par>
+        <p:cTn id="1" dur="indefinite" restart="never" nodeType="tmRoot"/>
+      </p:par>
+    </p:tnLst>
+  </p:timing>
 </p:sld>
 </file>
 
@@ -12835,7 +10955,7 @@
         </p:nvSpPr>
         <p:spPr>
           <a:xfrm>
-            <a:off x="4663440" y="1030986"/>
+            <a:off x="4670018" y="1030986"/>
             <a:ext cx="4206240" cy="4137660"/>
           </a:xfrm>
           <a:prstGeom prst="rect">
@@ -13242,6 +11362,13 @@
   <p:clrMapOvr>
     <a:masterClrMapping/>
   </p:clrMapOvr>
+  <p:timing>
+    <p:tnLst>
+      <p:par>
+        <p:cTn id="1" dur="indefinite" restart="never" nodeType="tmRoot"/>
+      </p:par>
+    </p:tnLst>
+  </p:timing>
 </p:sld>
 </file>
 
@@ -14225,6 +12352,13 @@
   <p:clrMapOvr>
     <a:masterClrMapping/>
   </p:clrMapOvr>
+  <p:timing>
+    <p:tnLst>
+      <p:par>
+        <p:cTn id="1" dur="indefinite" restart="never" nodeType="tmRoot"/>
+      </p:par>
+    </p:tnLst>
+  </p:timing>
 </p:sld>
 </file>
 
@@ -14551,6 +12685,13 @@
   <p:clrMapOvr>
     <a:masterClrMapping/>
   </p:clrMapOvr>
+  <p:timing>
+    <p:tnLst>
+      <p:par>
+        <p:cTn id="1" dur="indefinite" restart="never" nodeType="tmRoot"/>
+      </p:par>
+    </p:tnLst>
+  </p:timing>
 </p:sld>
 </file>
 
@@ -15159,6 +13300,13 @@
   <p:clrMapOvr>
     <a:masterClrMapping/>
   </p:clrMapOvr>
+  <p:timing>
+    <p:tnLst>
+      <p:par>
+        <p:cTn id="1" dur="indefinite" restart="never" nodeType="tmRoot"/>
+      </p:par>
+    </p:tnLst>
+  </p:timing>
 </p:sld>
 </file>
 
